--- a/examples/pipeline.pptx
+++ b/examples/pipeline.pptx
@@ -7,7 +7,7 @@
   <p:sldIdLst>
     <p:sldId id="256" r:id="rId7"/>
   </p:sldIdLst>
-  <p:sldSz cx="2951837" cy="1451610" type="screen4x3"/>
+  <p:sldSz cx="2761734" cy="1511141" type="screen4x3"/>
   <p:notesSz cx="6858000" cy="9144000"/>
   <p:defaultTextStyle>
     <a:defPPr>
@@ -3090,13 +3090,13 @@
       <p:grpSpPr/>
       <p:cxnSp>
         <p:nvCxnSpPr>
-          <p:cNvPr id="2" name="Connector 1"/>
+          <p:cNvPr id="2" name="arrow 1"/>
           <p:cNvCxnSpPr/>
           <p:nvPr/>
         </p:nvCxnSpPr>
         <p:spPr>
           <a:xfrm>
-            <a:off x="137160" y="351472"/>
+            <a:off x="137160" y="320516"/>
             <a:ext cx="914400" cy="0"/>
           </a:xfrm>
           <a:prstGeom prst="line">
@@ -3127,14 +3127,14 @@
       </p:cxnSp>
       <p:sp>
         <p:nvSpPr>
-          <p:cNvPr id="3" name="TextBox 2"/>
+          <p:cNvPr id="3" name="arrow 1 text 1"/>
           <p:cNvSpPr txBox="1"/>
           <p:nvPr/>
         </p:nvSpPr>
         <p:spPr>
           <a:xfrm>
-            <a:off x="274320" y="194310"/>
-            <a:ext cx="640080" cy="131445"/>
+            <a:off x="220980" y="137160"/>
+            <a:ext cx="746760" cy="153352"/>
           </a:xfrm>
           <a:prstGeom prst="rect">
             <a:avLst/>
@@ -3149,11 +3149,12 @@
           <a:p>
             <a:pPr algn="ctr"/>
             <a:r>
-              <a:rPr b="0" i="0" sz="900">
+              <a:rPr b="0" i="0" sz="1050">
                 <a:solidFill>
                   <a:srgbClr val="000000"/>
                 </a:solidFill>
-                <a:latin typeface="Arial"/>
+                <a:latin typeface="+mn-lt"/>
+                <a:ea typeface="+mn-ea"/>
               </a:rPr>
               <a:t>Markdown</a:t>
             </a:r>
@@ -3162,14 +3163,14 @@
       </p:sp>
       <p:sp>
         <p:nvSpPr>
-          <p:cNvPr id="4" name="TextBox 3"/>
+          <p:cNvPr id="4" name="arrow 1 text 2"/>
           <p:cNvSpPr txBox="1"/>
           <p:nvPr/>
         </p:nvSpPr>
         <p:spPr>
           <a:xfrm>
-            <a:off x="354330" y="377190"/>
-            <a:ext cx="480059" cy="131445"/>
+            <a:off x="314325" y="350520"/>
+            <a:ext cx="560069" cy="153352"/>
           </a:xfrm>
           <a:prstGeom prst="rect">
             <a:avLst/>
@@ -3184,11 +3185,12 @@
           <a:p>
             <a:pPr algn="ctr"/>
             <a:r>
-              <a:rPr b="0" i="0" sz="900">
+              <a:rPr b="0" i="0" sz="1050">
                 <a:solidFill>
                   <a:srgbClr val="000000"/>
                 </a:solidFill>
-                <a:latin typeface="Arial"/>
+                <a:latin typeface="+mn-lt"/>
+                <a:ea typeface="+mn-ea"/>
               </a:rPr>
               <a:t>Source</a:t>
             </a:r>
@@ -3197,18 +3199,18 @@
       </p:sp>
       <p:sp>
         <p:nvSpPr>
-          <p:cNvPr id="5" name="Rounded Rectangle 4"/>
+          <p:cNvPr id="5" name="box 1"/>
           <p:cNvSpPr/>
           <p:nvPr/>
         </p:nvSpPr>
         <p:spPr>
           <a:xfrm>
             <a:off x="1051560" y="137160"/>
-            <a:ext cx="848717" cy="428625"/>
+            <a:ext cx="658614" cy="366712"/>
           </a:xfrm>
           <a:prstGeom prst="roundRect">
             <a:avLst>
-              <a:gd name="adj" fmla="val 22222"/>
+              <a:gd name="adj" fmla="val 25974"/>
             </a:avLst>
           </a:prstGeom>
           <a:noFill/>
@@ -3233,55 +3235,45 @@
           </a:fontRef>
         </p:style>
         <p:txBody>
-          <a:bodyPr rtlCol="0" anchor="ctr" wrap="square" lIns="0" rIns="0" tIns="0" bIns="0"/>
+          <a:bodyPr rtlCol="0" anchor="ctr" wrap="none" lIns="0" rIns="0" tIns="0" bIns="0"/>
           <a:lstStyle/>
           <a:p>
             <a:pPr algn="ctr"/>
             <a:r>
-              <a:rPr b="0" i="0" sz="900">
+              <a:rPr b="0" i="0" sz="1050">
                 <a:solidFill>
                   <a:srgbClr val="000000"/>
                 </a:solidFill>
-                <a:latin typeface="Arial"/>
+                <a:latin typeface="+mn-lt"/>
+                <a:ea typeface="+mn-ea"/>
               </a:rPr>
-              <a:t>Markdown</a:t>
+              <a:t>pikslide</a:t>
             </a:r>
           </a:p>
           <a:p>
             <a:pPr algn="ctr"/>
             <a:r>
-              <a:rPr b="0" i="0" sz="900">
+              <a:rPr b="0" i="0" sz="1050">
                 <a:solidFill>
                   <a:srgbClr val="000000"/>
                 </a:solidFill>
-                <a:latin typeface="Arial"/>
+                <a:latin typeface="+mn-lt"/>
+                <a:ea typeface="+mn-ea"/>
               </a:rPr>
               <a:t>Formatter</a:t>
             </a:r>
           </a:p>
-          <a:p>
-            <a:pPr algn="ctr"/>
-            <a:r>
-              <a:rPr b="0" i="0" sz="900">
-                <a:solidFill>
-                  <a:srgbClr val="000000"/>
-                </a:solidFill>
-                <a:latin typeface="Arial"/>
-              </a:rPr>
-              <a:t>(markdown.c)</a:t>
-            </a:r>
-          </a:p>
         </p:txBody>
       </p:sp>
       <p:cxnSp>
         <p:nvCxnSpPr>
-          <p:cNvPr id="6" name="Connector 5"/>
+          <p:cNvPr id="6" name="arrow 2"/>
           <p:cNvCxnSpPr/>
           <p:nvPr/>
         </p:nvCxnSpPr>
         <p:spPr>
           <a:xfrm>
-            <a:off x="1900277" y="351472"/>
+            <a:off x="1710174" y="320516"/>
             <a:ext cx="914400" cy="0"/>
           </a:xfrm>
           <a:prstGeom prst="line">
@@ -3312,14 +3304,14 @@
       </p:cxnSp>
       <p:sp>
         <p:nvSpPr>
-          <p:cNvPr id="7" name="TextBox 6"/>
+          <p:cNvPr id="7" name="arrow 2 text 1"/>
           <p:cNvSpPr txBox="1"/>
           <p:nvPr/>
         </p:nvSpPr>
         <p:spPr>
           <a:xfrm>
-            <a:off x="2037437" y="194310"/>
-            <a:ext cx="640080" cy="131445"/>
+            <a:off x="1980684" y="137160"/>
+            <a:ext cx="373379" cy="153352"/>
           </a:xfrm>
           <a:prstGeom prst="rect">
             <a:avLst/>
@@ -3334,27 +3326,28 @@
           <a:p>
             <a:pPr algn="ctr"/>
             <a:r>
-              <a:rPr b="0" i="0" sz="900">
+              <a:rPr b="0" i="0" sz="1050">
                 <a:solidFill>
                   <a:srgbClr val="000000"/>
                 </a:solidFill>
-                <a:latin typeface="Arial"/>
+                <a:latin typeface="+mn-lt"/>
+                <a:ea typeface="+mn-ea"/>
               </a:rPr>
-              <a:t>HTML+SVG</a:t>
-            </a:r>
-          </a:p>
-        </p:txBody>
-      </p:sp>
-      <p:sp>
-        <p:nvSpPr>
-          <p:cNvPr id="8" name="TextBox 7"/>
+              <a:t>PPTX</a:t>
+            </a:r>
+          </a:p>
+        </p:txBody>
+      </p:sp>
+      <p:sp>
+        <p:nvSpPr>
+          <p:cNvPr id="8" name="arrow 2 text 2"/>
           <p:cNvSpPr txBox="1"/>
           <p:nvPr/>
         </p:nvSpPr>
         <p:spPr>
           <a:xfrm>
-            <a:off x="2117447" y="377190"/>
-            <a:ext cx="480060" cy="131445"/>
+            <a:off x="1887339" y="350520"/>
+            <a:ext cx="560069" cy="153352"/>
           </a:xfrm>
           <a:prstGeom prst="rect">
             <a:avLst/>
@@ -3369,11 +3362,12 @@
           <a:p>
             <a:pPr algn="ctr"/>
             <a:r>
-              <a:rPr b="0" i="0" sz="900">
+              <a:rPr b="0" i="0" sz="1050">
                 <a:solidFill>
                   <a:srgbClr val="000000"/>
                 </a:solidFill>
-                <a:latin typeface="Arial"/>
+                <a:latin typeface="+mn-lt"/>
+                <a:ea typeface="+mn-ea"/>
               </a:rPr>
               <a:t>Output</a:t>
             </a:r>
@@ -3382,13 +3376,13 @@
       </p:sp>
       <p:cxnSp>
         <p:nvCxnSpPr>
-          <p:cNvPr id="9" name="Connector 8"/>
+          <p:cNvPr id="9" name="arrow 3"/>
           <p:cNvCxnSpPr/>
           <p:nvPr/>
         </p:nvCxnSpPr>
         <p:spPr>
           <a:xfrm>
-            <a:off x="1475918" y="565785"/>
+            <a:off x="1380867" y="503872"/>
             <a:ext cx="0" cy="320040"/>
           </a:xfrm>
           <a:prstGeom prst="line">
@@ -3399,7 +3393,7 @@
               <a:srgbClr val="000000"/>
             </a:solidFill>
             <a:headEnd type="triangle"/>
-            <a:tailEnd type="triangle"/>
+            <a:tailEnd type="none"/>
           </a:ln>
         </p:spPr>
         <p:style>
@@ -3419,19 +3413,17 @@
       </p:cxnSp>
       <p:sp>
         <p:nvSpPr>
-          <p:cNvPr id="10" name="Rounded Rectangle 9"/>
+          <p:cNvPr id="10" name="cylinder 1"/>
           <p:cNvSpPr/>
           <p:nvPr/>
         </p:nvSpPr>
         <p:spPr>
           <a:xfrm>
-            <a:off x="1164967" y="885825"/>
-            <a:ext cx="621903" cy="428625"/>
+            <a:off x="1074975" y="823912"/>
+            <a:ext cx="611782" cy="550068"/>
           </a:xfrm>
-          <a:prstGeom prst="roundRect">
-            <a:avLst>
-              <a:gd name="adj" fmla="val 22222"/>
-            </a:avLst>
+          <a:prstGeom prst="can">
+            <a:avLst/>
           </a:prstGeom>
           <a:noFill/>
           <a:ln w="13716">
@@ -3455,42 +3447,32 @@
           </a:fontRef>
         </p:style>
         <p:txBody>
-          <a:bodyPr rtlCol="0" anchor="ctr" wrap="square" lIns="0" rIns="0" tIns="0" bIns="0"/>
+          <a:bodyPr rtlCol="0" anchor="ctr" wrap="none" lIns="0" rIns="0" tIns="0" bIns="0"/>
           <a:lstStyle/>
           <a:p>
             <a:pPr algn="ctr"/>
             <a:r>
-              <a:rPr b="0" i="0" sz="900">
+              <a:rPr b="0" i="0" sz="1050">
                 <a:solidFill>
                   <a:srgbClr val="000000"/>
                 </a:solidFill>
-                <a:latin typeface="Arial"/>
+                <a:latin typeface="+mn-lt"/>
+                <a:ea typeface="+mn-ea"/>
               </a:rPr>
-              <a:t>Pikchr</a:t>
+              <a:t>pikslide</a:t>
             </a:r>
           </a:p>
           <a:p>
             <a:pPr algn="ctr"/>
             <a:r>
-              <a:rPr b="0" i="0" sz="900">
+              <a:rPr b="0" i="0" sz="1050">
                 <a:solidFill>
                   <a:srgbClr val="000000"/>
                 </a:solidFill>
-                <a:latin typeface="Arial"/>
+                <a:latin typeface="+mn-lt"/>
+                <a:ea typeface="+mn-ea"/>
               </a:rPr>
-              <a:t>Formatter</a:t>
-            </a:r>
-          </a:p>
-          <a:p>
-            <a:pPr algn="ctr"/>
-            <a:r>
-              <a:rPr b="0" i="0" sz="900">
-                <a:solidFill>
-                  <a:srgbClr val="000000"/>
-                </a:solidFill>
-                <a:latin typeface="Arial"/>
-              </a:rPr>
-              <a:t>(pikchr.c)</a:t>
+              <a:t>language</a:t>
             </a:r>
           </a:p>
         </p:txBody>

--- a/examples/pipeline.pptx
+++ b/examples/pipeline.pptx
@@ -7,7 +7,7 @@
   <p:sldIdLst>
     <p:sldId id="256" r:id="rId7"/>
   </p:sldIdLst>
-  <p:sldSz cx="2761734" cy="1511141" type="screen4x3"/>
+  <p:sldSz cx="2761734" cy="1327785" type="screen4x3"/>
   <p:notesSz cx="6858000" cy="9144000"/>
   <p:defaultTextStyle>
     <a:defPPr>
@@ -3413,16 +3413,16 @@
       </p:cxnSp>
       <p:sp>
         <p:nvSpPr>
-          <p:cNvPr id="10" name="cylinder 1"/>
+          <p:cNvPr id="10" name="file 1"/>
           <p:cNvSpPr/>
           <p:nvPr/>
         </p:nvSpPr>
         <p:spPr>
           <a:xfrm>
-            <a:off x="1074975" y="823912"/>
-            <a:ext cx="611782" cy="550068"/>
+            <a:off x="1058505" y="823912"/>
+            <a:ext cx="644723" cy="366712"/>
           </a:xfrm>
-          <a:prstGeom prst="can">
+          <a:prstGeom prst="foldedCorner">
             <a:avLst/>
           </a:prstGeom>
           <a:noFill/>
@@ -3472,7 +3472,7 @@
                 <a:latin typeface="+mn-lt"/>
                 <a:ea typeface="+mn-ea"/>
               </a:rPr>
-              <a:t>language</a:t>
+              <a:t>Language</a:t>
             </a:r>
           </a:p>
         </p:txBody>

--- a/examples/pipeline.pptx
+++ b/examples/pipeline.pptx
@@ -7,7 +7,7 @@
   <p:sldIdLst>
     <p:sldId id="256" r:id="rId7"/>
   </p:sldIdLst>
-  <p:sldSz cx="2761734" cy="1327785" type="screen4x3"/>
+  <p:sldSz cx="2827411" cy="1327785" type="screen4x3"/>
   <p:notesSz cx="6858000" cy="9144000"/>
   <p:defaultTextStyle>
     <a:defPPr>
@@ -3109,6 +3109,7 @@
             <a:headEnd type="none"/>
             <a:tailEnd type="triangle"/>
           </a:ln>
+          <a:effectLst/>
         </p:spPr>
         <p:style>
           <a:lnRef idx="2">
@@ -3133,8 +3134,8 @@
         </p:nvSpPr>
         <p:spPr>
           <a:xfrm>
-            <a:off x="220980" y="137160"/>
-            <a:ext cx="746760" cy="153352"/>
+            <a:off x="301056" y="137160"/>
+            <a:ext cx="586606" cy="153352"/>
           </a:xfrm>
           <a:prstGeom prst="rect">
             <a:avLst/>
@@ -3169,8 +3170,8 @@
         </p:nvSpPr>
         <p:spPr>
           <a:xfrm>
-            <a:off x="314325" y="350520"/>
-            <a:ext cx="560069" cy="153352"/>
+            <a:off x="301056" y="350520"/>
+            <a:ext cx="586606" cy="153352"/>
           </a:xfrm>
           <a:prstGeom prst="rect">
             <a:avLst/>
@@ -3206,7 +3207,7 @@
         <p:spPr>
           <a:xfrm>
             <a:off x="1051560" y="137160"/>
-            <a:ext cx="658614" cy="366712"/>
+            <a:ext cx="724291" cy="366712"/>
           </a:xfrm>
           <a:prstGeom prst="roundRect">
             <a:avLst>
@@ -3219,6 +3220,7 @@
               <a:srgbClr val="000000"/>
             </a:solidFill>
           </a:ln>
+          <a:effectLst/>
         </p:spPr>
         <p:style>
           <a:lnRef idx="1">
@@ -3235,7 +3237,7 @@
           </a:fontRef>
         </p:style>
         <p:txBody>
-          <a:bodyPr rtlCol="0" anchor="ctr" wrap="none" lIns="0" rIns="0" tIns="0" bIns="0"/>
+          <a:bodyPr rtlCol="0" anchor="ctr" wrap="none" tIns="0" bIns="0"/>
           <a:lstStyle/>
           <a:p>
             <a:pPr algn="ctr"/>
@@ -3273,7 +3275,7 @@
         </p:nvCxnSpPr>
         <p:spPr>
           <a:xfrm>
-            <a:off x="1710174" y="320516"/>
+            <a:off x="1775851" y="320516"/>
             <a:ext cx="914400" cy="0"/>
           </a:xfrm>
           <a:prstGeom prst="line">
@@ -3286,6 +3288,7 @@
             <a:headEnd type="none"/>
             <a:tailEnd type="triangle"/>
           </a:ln>
+          <a:effectLst/>
         </p:spPr>
         <p:style>
           <a:lnRef idx="2">
@@ -3310,8 +3313,8 @@
         </p:nvSpPr>
         <p:spPr>
           <a:xfrm>
-            <a:off x="1980684" y="137160"/>
-            <a:ext cx="373379" cy="153352"/>
+            <a:off x="2039116" y="137160"/>
+            <a:ext cx="387870" cy="153352"/>
           </a:xfrm>
           <a:prstGeom prst="rect">
             <a:avLst/>
@@ -3346,8 +3349,8 @@
         </p:nvSpPr>
         <p:spPr>
           <a:xfrm>
-            <a:off x="1887339" y="350520"/>
-            <a:ext cx="560069" cy="153352"/>
+            <a:off x="2039116" y="350520"/>
+            <a:ext cx="387870" cy="153352"/>
           </a:xfrm>
           <a:prstGeom prst="rect">
             <a:avLst/>
@@ -3382,7 +3385,7 @@
         </p:nvCxnSpPr>
         <p:spPr>
           <a:xfrm>
-            <a:off x="1380867" y="503872"/>
+            <a:off x="1413705" y="503872"/>
             <a:ext cx="0" cy="320040"/>
           </a:xfrm>
           <a:prstGeom prst="line">
@@ -3395,6 +3398,7 @@
             <a:headEnd type="triangle"/>
             <a:tailEnd type="none"/>
           </a:ln>
+          <a:effectLst/>
         </p:spPr>
         <p:style>
           <a:lnRef idx="2">
@@ -3419,8 +3423,8 @@
         </p:nvSpPr>
         <p:spPr>
           <a:xfrm>
-            <a:off x="1058505" y="823912"/>
-            <a:ext cx="644723" cy="366712"/>
+            <a:off x="1064892" y="823912"/>
+            <a:ext cx="697626" cy="366712"/>
           </a:xfrm>
           <a:prstGeom prst="foldedCorner">
             <a:avLst/>
@@ -3431,6 +3435,7 @@
               <a:srgbClr val="000000"/>
             </a:solidFill>
           </a:ln>
+          <a:effectLst/>
         </p:spPr>
         <p:style>
           <a:lnRef idx="1">
@@ -3447,7 +3452,7 @@
           </a:fontRef>
         </p:style>
         <p:txBody>
-          <a:bodyPr rtlCol="0" anchor="ctr" wrap="none" lIns="0" rIns="0" tIns="0" bIns="0"/>
+          <a:bodyPr rtlCol="0" anchor="ctr" wrap="none" tIns="0" bIns="0"/>
           <a:lstStyle/>
           <a:p>
             <a:pPr algn="ctr"/>
